--- a/entrega_final/TalentPact_Defensa_TFM_20min.pptx
+++ b/entrega_final/TalentPact_Defensa_TFM_20min.pptx
@@ -5585,6 +5585,53 @@
           </a:prstGeom>
         </p:spPr>
       </p:pic>
+      <p:sp>
+        <p:nvSpPr>
+          <p:cNvPr id="3" name="Rectangle 2">
+            <a:hlinkClick r:id="rId3"/>
+          </p:cNvPr>
+          <p:cNvSpPr/>
+          <p:nvPr/>
+        </p:nvSpPr>
+        <p:spPr>
+          <a:xfrm>
+            <a:off x="658368" y="3200400"/>
+            <a:ext cx="3200400" cy="502920"/>
+          </a:xfrm>
+          <a:prstGeom prst="rect">
+            <a:avLst/>
+          </a:prstGeom>
+          <a:solidFill>
+            <a:srgbClr val="FFFFFF">
+              <a:alpha val="0"/>
+            </a:srgbClr>
+          </a:solidFill>
+          <a:ln>
+            <a:noFill/>
+          </a:ln>
+        </p:spPr>
+        <p:style>
+          <a:lnRef idx="1">
+            <a:schemeClr val="accent1"/>
+          </a:lnRef>
+          <a:fillRef idx="3">
+            <a:schemeClr val="accent1"/>
+          </a:fillRef>
+          <a:effectRef idx="2">
+            <a:schemeClr val="accent1"/>
+          </a:effectRef>
+          <a:fontRef idx="minor">
+            <a:schemeClr val="lt1"/>
+          </a:fontRef>
+        </p:style>
+        <p:txBody>
+          <a:bodyPr rtlCol="0" anchor="ctr"/>
+          <a:lstStyle/>
+          <a:p>
+            <a:pPr algn="ctr"/>
+          </a:p>
+        </p:txBody>
+      </p:sp>
     </p:spTree>
   </p:cSld>
   <p:clrMapOvr>
@@ -5879,6 +5926,53 @@
           </a:prstGeom>
         </p:spPr>
       </p:pic>
+      <p:sp>
+        <p:nvSpPr>
+          <p:cNvPr id="3" name="Rectangle 2">
+            <a:hlinkClick r:id="rId3"/>
+          </p:cNvPr>
+          <p:cNvSpPr/>
+          <p:nvPr/>
+        </p:nvSpPr>
+        <p:spPr>
+          <a:xfrm>
+            <a:off x="822960" y="3520440"/>
+            <a:ext cx="6583680" cy="384048"/>
+          </a:xfrm>
+          <a:prstGeom prst="rect">
+            <a:avLst/>
+          </a:prstGeom>
+          <a:solidFill>
+            <a:srgbClr val="FFFFFF">
+              <a:alpha val="0"/>
+            </a:srgbClr>
+          </a:solidFill>
+          <a:ln>
+            <a:noFill/>
+          </a:ln>
+        </p:spPr>
+        <p:style>
+          <a:lnRef idx="1">
+            <a:schemeClr val="accent1"/>
+          </a:lnRef>
+          <a:fillRef idx="3">
+            <a:schemeClr val="accent1"/>
+          </a:fillRef>
+          <a:effectRef idx="2">
+            <a:schemeClr val="accent1"/>
+          </a:effectRef>
+          <a:fontRef idx="minor">
+            <a:schemeClr val="lt1"/>
+          </a:fontRef>
+        </p:style>
+        <p:txBody>
+          <a:bodyPr rtlCol="0" anchor="ctr"/>
+          <a:lstStyle/>
+          <a:p>
+            <a:pPr algn="ctr"/>
+          </a:p>
+        </p:txBody>
+      </p:sp>
     </p:spTree>
   </p:cSld>
   <p:clrMapOvr>
@@ -5921,6 +6015,53 @@
           </a:prstGeom>
         </p:spPr>
       </p:pic>
+      <p:sp>
+        <p:nvSpPr>
+          <p:cNvPr id="3" name="Rectangle 2">
+            <a:hlinkClick r:id="rId3"/>
+          </p:cNvPr>
+          <p:cNvSpPr/>
+          <p:nvPr/>
+        </p:nvSpPr>
+        <p:spPr>
+          <a:xfrm>
+            <a:off x="658368" y="457200"/>
+            <a:ext cx="5669280" cy="384048"/>
+          </a:xfrm>
+          <a:prstGeom prst="rect">
+            <a:avLst/>
+          </a:prstGeom>
+          <a:solidFill>
+            <a:srgbClr val="FFFFFF">
+              <a:alpha val="0"/>
+            </a:srgbClr>
+          </a:solidFill>
+          <a:ln>
+            <a:noFill/>
+          </a:ln>
+        </p:spPr>
+        <p:style>
+          <a:lnRef idx="1">
+            <a:schemeClr val="accent1"/>
+          </a:lnRef>
+          <a:fillRef idx="3">
+            <a:schemeClr val="accent1"/>
+          </a:fillRef>
+          <a:effectRef idx="2">
+            <a:schemeClr val="accent1"/>
+          </a:effectRef>
+          <a:fontRef idx="minor">
+            <a:schemeClr val="lt1"/>
+          </a:fontRef>
+        </p:style>
+        <p:txBody>
+          <a:bodyPr rtlCol="0" anchor="ctr"/>
+          <a:lstStyle/>
+          <a:p>
+            <a:pPr algn="ctr"/>
+          </a:p>
+        </p:txBody>
+      </p:sp>
     </p:spTree>
   </p:cSld>
   <p:clrMapOvr>
@@ -6005,6 +6146,53 @@
           </a:prstGeom>
         </p:spPr>
       </p:pic>
+      <p:sp>
+        <p:nvSpPr>
+          <p:cNvPr id="3" name="Rectangle 2">
+            <a:hlinkClick r:id="rId3"/>
+          </p:cNvPr>
+          <p:cNvSpPr/>
+          <p:nvPr/>
+        </p:nvSpPr>
+        <p:spPr>
+          <a:xfrm>
+            <a:off x="658368" y="1572768"/>
+            <a:ext cx="4937760" cy="822960"/>
+          </a:xfrm>
+          <a:prstGeom prst="rect">
+            <a:avLst/>
+          </a:prstGeom>
+          <a:solidFill>
+            <a:srgbClr val="FFFFFF">
+              <a:alpha val="0"/>
+            </a:srgbClr>
+          </a:solidFill>
+          <a:ln>
+            <a:noFill/>
+          </a:ln>
+        </p:spPr>
+        <p:style>
+          <a:lnRef idx="1">
+            <a:schemeClr val="accent1"/>
+          </a:lnRef>
+          <a:fillRef idx="3">
+            <a:schemeClr val="accent1"/>
+          </a:fillRef>
+          <a:effectRef idx="2">
+            <a:schemeClr val="accent1"/>
+          </a:effectRef>
+          <a:fontRef idx="minor">
+            <a:schemeClr val="lt1"/>
+          </a:fontRef>
+        </p:style>
+        <p:txBody>
+          <a:bodyPr rtlCol="0" anchor="ctr"/>
+          <a:lstStyle/>
+          <a:p>
+            <a:pPr algn="ctr"/>
+          </a:p>
+        </p:txBody>
+      </p:sp>
     </p:spTree>
   </p:cSld>
   <p:clrMapOvr>
@@ -6257,6 +6445,53 @@
           </a:prstGeom>
         </p:spPr>
       </p:pic>
+      <p:sp>
+        <p:nvSpPr>
+          <p:cNvPr id="3" name="Rectangle 2">
+            <a:hlinkClick r:id="rId3"/>
+          </p:cNvPr>
+          <p:cNvSpPr/>
+          <p:nvPr/>
+        </p:nvSpPr>
+        <p:spPr>
+          <a:xfrm>
+            <a:off x="658368" y="4572000"/>
+            <a:ext cx="4023360" cy="960120"/>
+          </a:xfrm>
+          <a:prstGeom prst="rect">
+            <a:avLst/>
+          </a:prstGeom>
+          <a:solidFill>
+            <a:srgbClr val="FFFFFF">
+              <a:alpha val="0"/>
+            </a:srgbClr>
+          </a:solidFill>
+          <a:ln>
+            <a:noFill/>
+          </a:ln>
+        </p:spPr>
+        <p:style>
+          <a:lnRef idx="1">
+            <a:schemeClr val="accent1"/>
+          </a:lnRef>
+          <a:fillRef idx="3">
+            <a:schemeClr val="accent1"/>
+          </a:fillRef>
+          <a:effectRef idx="2">
+            <a:schemeClr val="accent1"/>
+          </a:effectRef>
+          <a:fontRef idx="minor">
+            <a:schemeClr val="lt1"/>
+          </a:fontRef>
+        </p:style>
+        <p:txBody>
+          <a:bodyPr rtlCol="0" anchor="ctr"/>
+          <a:lstStyle/>
+          <a:p>
+            <a:pPr algn="ctr"/>
+          </a:p>
+        </p:txBody>
+      </p:sp>
     </p:spTree>
   </p:cSld>
   <p:clrMapOvr>
